--- a/docs/situation_report_prozess.pptx
+++ b/docs/situation_report_prozess.pptx
@@ -14564,7 +14564,7 @@
                   <a:srgbClr val="E67E22"/>
                 </a:solidFill>
               </a:rPr>
-              <a:t>Sprache wahlen (DE / EN)</a:t>
+              <a:t>Sprache wahlen (DE / EN / RO / PT / FR)</a:t>
             </a:r>
           </a:p>
         </p:txBody>
@@ -14598,7 +14598,7 @@
                   <a:srgbClr val="2C3E50"/>
                 </a:solidFill>
               </a:rPr>
-              <a:t>Beide Oberflachen auf Deutsch oder Englisch nutzbar. Die gewunschte Sprache wird beim nachsten Start beibehalten.</a:t>
+              <a:t>Launcher in 5 Sprachen nutzbar; build_reports und transform_data auf Deutsch oder Englisch. Die gewunschte Sprache wird beim nachsten Start beibehalten.</a:t>
             </a:r>
           </a:p>
         </p:txBody>
@@ -14910,7 +14910,7 @@
                   <a:srgbClr val="2C3E50"/>
                 </a:solidFill>
               </a:rPr>
-              <a:t>PDF-Handbuch in Deutsch und Englisch direkt aus dem Hilfemenu abrufbar -- auch fur nicht-technische Anwender geschrieben.</a:t>
+              <a:t>PDF-Handbuch: Launcher in 5 Sprachen (DE, EN, RO, PT, FR), build_reports und transform_data je DE + EN -- direkt aus dem Hilfemenu abrufbar.</a:t>
             </a:r>
           </a:p>
         </p:txBody>

--- a/docs/situation_report_prozess.pptx
+++ b/docs/situation_report_prozess.pptx
@@ -3662,7 +3662,7 @@
                   <a:srgbClr val="9EA8B3"/>
                 </a:solidFill>
               </a:rPr>
-              <a:t>github.com/Jaegerfeld/situation-report  |  Stand April 2026</a:t>
+              <a:t>github.com/Jaegerfeld/situation-report  |  Stand Mai 2026</a:t>
             </a:r>
           </a:p>
         </p:txBody>
@@ -6378,7 +6378,7 @@
                   <a:srgbClr val="2980B9"/>
                 </a:solidFill>
               </a:rPr>
-              <a:t>Modul: transform_data</a:t>
+              <a:t>Modul: transform_data, helper</a:t>
             </a:r>
           </a:p>
         </p:txBody>
@@ -6962,7 +6962,7 @@
                   <a:srgbClr val="2980B9"/>
                 </a:solidFill>
               </a:rPr>
-              <a:t>Modul: transform_data</a:t>
+              <a:t>Modul: transform_data, helper</a:t>
             </a:r>
           </a:p>
         </p:txBody>

--- a/docs/situation_report_prozess.pptx
+++ b/docs/situation_report_prozess.pptx
@@ -6378,7 +6378,7 @@
                   <a:srgbClr val="2980B9"/>
                 </a:solidFill>
               </a:rPr>
-              <a:t>Modul: transform_data, helper</a:t>
+              <a:t>Modul: transform_data</a:t>
             </a:r>
           </a:p>
         </p:txBody>
@@ -6962,7 +6962,7 @@
                   <a:srgbClr val="2980B9"/>
                 </a:solidFill>
               </a:rPr>
-              <a:t>Modul: transform_data, helper</a:t>
+              <a:t>Modul: transform_data</a:t>
             </a:r>
           </a:p>
         </p:txBody>
